--- a/test-corpus/word-verification/state-diagram.pptx
+++ b/test-corpus/word-verification/state-diagram.pptx
@@ -144,7 +144,7 @@
         </p:nvCxnSpPr>
         <p:spPr>
           <a:xfrm>
-            <a:off x="6239746" y="1532334"/>
+            <a:off x="4118338" y="1532334"/>
             <a:ext cx="1" cy="719478"/>
           </a:xfrm>
           <a:prstGeom prst="line">
@@ -167,7 +167,7 @@
         </p:nvCxnSpPr>
         <p:spPr>
           <a:xfrm flipH="1">
-            <a:off x="5166562" y="2683499"/>
+            <a:off x="3045154" y="2683499"/>
             <a:ext cx="825526" cy="719478"/>
           </a:xfrm>
           <a:prstGeom prst="line">
@@ -190,7 +190,7 @@
         </p:nvSpPr>
         <p:spPr>
           <a:xfrm>
-            <a:off x="5363482" y="2923325"/>
+            <a:off x="3242074" y="2923325"/>
             <a:ext cx="431687" cy="239826"/>
           </a:xfrm>
           <a:prstGeom prst="rect">
@@ -232,7 +232,7 @@
         </p:nvCxnSpPr>
         <p:spPr>
           <a:xfrm>
-            <a:off x="4918904" y="3834663"/>
+            <a:off x="2797496" y="3834663"/>
             <a:ext cx="1" cy="719478"/>
           </a:xfrm>
           <a:prstGeom prst="line">
@@ -255,7 +255,7 @@
         </p:nvCxnSpPr>
         <p:spPr>
           <a:xfrm>
-            <a:off x="5060152" y="4961845"/>
+            <a:off x="2938744" y="4961845"/>
             <a:ext cx="498523" cy="719478"/>
           </a:xfrm>
           <a:prstGeom prst="line">
@@ -278,7 +278,7 @@
         </p:nvSpPr>
         <p:spPr>
           <a:xfrm>
-            <a:off x="5179908" y="5201671"/>
+            <a:off x="3058500" y="5201671"/>
             <a:ext cx="259012" cy="239826"/>
           </a:xfrm>
           <a:prstGeom prst="rect">
@@ -320,7 +320,7 @@
         </p:nvCxnSpPr>
         <p:spPr>
           <a:xfrm>
-            <a:off x="5122756" y="4856310"/>
+            <a:off x="3001348" y="4856310"/>
             <a:ext cx="1738438" cy="838439"/>
           </a:xfrm>
           <a:prstGeom prst="line">
@@ -343,7 +343,7 @@
         </p:nvSpPr>
         <p:spPr>
           <a:xfrm>
-            <a:off x="5804912" y="5155616"/>
+            <a:off x="3683504" y="5155616"/>
             <a:ext cx="374128" cy="239826"/>
           </a:xfrm>
           <a:prstGeom prst="rect">
@@ -385,7 +385,7 @@
         </p:nvCxnSpPr>
         <p:spPr>
           <a:xfrm flipV="1">
-            <a:off x="5741683" y="2683499"/>
+            <a:off x="3620275" y="2683499"/>
             <a:ext cx="464610" cy="2997824"/>
           </a:xfrm>
           <a:prstGeom prst="line">
@@ -408,7 +408,7 @@
         </p:nvSpPr>
         <p:spPr>
           <a:xfrm>
-            <a:off x="5758145" y="4062498"/>
+            <a:off x="3636737" y="4062498"/>
             <a:ext cx="431687" cy="239826"/>
           </a:xfrm>
           <a:prstGeom prst="rect">
@@ -450,7 +450,7 @@
         </p:nvCxnSpPr>
         <p:spPr>
           <a:xfrm flipH="1" flipV="1">
-            <a:off x="6305272" y="2683499"/>
+            <a:off x="4183864" y="2683499"/>
             <a:ext cx="910092" cy="2997824"/>
           </a:xfrm>
           <a:prstGeom prst="line">
@@ -473,7 +473,7 @@
         </p:nvSpPr>
         <p:spPr>
           <a:xfrm>
-            <a:off x="6544474" y="4062498"/>
+            <a:off x="4423066" y="4062498"/>
             <a:ext cx="431687" cy="239826"/>
           </a:xfrm>
           <a:prstGeom prst="rect">
@@ -515,7 +515,7 @@
         </p:nvCxnSpPr>
         <p:spPr>
           <a:xfrm flipH="1">
-            <a:off x="6016845" y="2683499"/>
+            <a:off x="3895437" y="2683499"/>
             <a:ext cx="174561" cy="779434"/>
           </a:xfrm>
           <a:prstGeom prst="line">
@@ -538,7 +538,7 @@
         </p:nvSpPr>
         <p:spPr>
           <a:xfrm>
-            <a:off x="6131824" y="1316491"/>
+            <a:off x="4010416" y="1316491"/>
             <a:ext cx="215843" cy="215843"/>
           </a:xfrm>
           <a:prstGeom prst="ellipse">
@@ -560,7 +560,7 @@
         </p:nvSpPr>
         <p:spPr>
           <a:xfrm>
-            <a:off x="5820050" y="2251812"/>
+            <a:off x="3698642" y="2251812"/>
             <a:ext cx="839391" cy="431687"/>
           </a:xfrm>
           <a:prstGeom prst="roundRect">
@@ -584,7 +584,7 @@
         </p:nvSpPr>
         <p:spPr>
           <a:xfrm>
-            <a:off x="5820050" y="2251812"/>
+            <a:off x="3698642" y="2251812"/>
             <a:ext cx="839391" cy="431687"/>
           </a:xfrm>
           <a:prstGeom prst="rect">
@@ -626,7 +626,7 @@
         </p:nvSpPr>
         <p:spPr>
           <a:xfrm>
-            <a:off x="4491415" y="3402976"/>
+            <a:off x="2370007" y="3402976"/>
             <a:ext cx="854980" cy="431687"/>
           </a:xfrm>
           <a:prstGeom prst="roundRect">
@@ -650,7 +650,7 @@
         </p:nvSpPr>
         <p:spPr>
           <a:xfrm>
-            <a:off x="4491415" y="3402976"/>
+            <a:off x="2370007" y="3402976"/>
             <a:ext cx="854980" cy="431687"/>
           </a:xfrm>
           <a:prstGeom prst="rect">
@@ -692,7 +692,7 @@
         </p:nvSpPr>
         <p:spPr>
           <a:xfrm>
-            <a:off x="4715052" y="4554141"/>
+            <a:off x="2593644" y="4554141"/>
             <a:ext cx="407704" cy="407704"/>
           </a:xfrm>
           <a:prstGeom prst="diamond">
@@ -716,7 +716,7 @@
         </p:nvSpPr>
         <p:spPr>
           <a:xfrm>
-            <a:off x="5280742" y="5681322"/>
+            <a:off x="3159334" y="5681322"/>
             <a:ext cx="854980" cy="431687"/>
           </a:xfrm>
           <a:prstGeom prst="roundRect">
@@ -740,7 +740,7 @@
         </p:nvSpPr>
         <p:spPr>
           <a:xfrm>
-            <a:off x="5280742" y="5681322"/>
+            <a:off x="3159334" y="5681322"/>
             <a:ext cx="854980" cy="431687"/>
           </a:xfrm>
           <a:prstGeom prst="rect">
@@ -782,7 +782,7 @@
         </p:nvSpPr>
         <p:spPr>
           <a:xfrm>
-            <a:off x="6861194" y="5681322"/>
+            <a:off x="4739786" y="5681322"/>
             <a:ext cx="839391" cy="431687"/>
           </a:xfrm>
           <a:prstGeom prst="roundRect">
@@ -806,7 +806,7 @@
         </p:nvSpPr>
         <p:spPr>
           <a:xfrm>
-            <a:off x="6861194" y="5681322"/>
+            <a:off x="4739786" y="5681322"/>
             <a:ext cx="839391" cy="431687"/>
           </a:xfrm>
           <a:prstGeom prst="rect">
@@ -848,7 +848,7 @@
         </p:nvSpPr>
         <p:spPr>
           <a:xfrm>
-            <a:off x="5826047" y="3462933"/>
+            <a:off x="3704639" y="3462933"/>
             <a:ext cx="311774" cy="311774"/>
           </a:xfrm>
           <a:prstGeom prst="ellipse">
@@ -872,7 +872,7 @@
         </p:nvSpPr>
         <p:spPr>
           <a:xfrm>
-            <a:off x="5913343" y="3550229"/>
+            <a:off x="3791935" y="3550229"/>
             <a:ext cx="137180" cy="137180"/>
           </a:xfrm>
           <a:prstGeom prst="ellipse">
@@ -885,6 +885,166 @@
             <a:noFill/>
           </a:ln>
         </p:spPr>
+      </p:sp>
+      <p:sp>
+        <p:nvSpPr>
+          <p:cNvPr id="4" name="Mermaid source"/>
+          <p:cNvSpPr/>
+          <p:nvPr/>
+        </p:nvSpPr>
+        <p:spPr>
+          <a:xfrm>
+            <a:off x="7674864" y="1028700"/>
+            <a:ext cx="4059936" cy="5372100"/>
+          </a:xfrm>
+          <a:prstGeom prst="rect">
+            <a:avLst/>
+          </a:prstGeom>
+          <a:solidFill>
+            <a:srgbClr val="F3F4F6"/>
+          </a:solidFill>
+          <a:ln w="9525">
+            <a:solidFill>
+              <a:srgbClr val="D1D5DB"/>
+            </a:solidFill>
+          </a:ln>
+        </p:spPr>
+        <p:txBody>
+          <a:bodyPr wrap="square" lIns="91440" tIns="45720" rIns="91440" bIns="45720" anchor="t">
+            <a:noAutofit/>
+          </a:bodyPr>
+          <a:lstStyle/>
+          <a:p>
+            <a:pPr algn="l"/>
+            <a:r>
+              <a:rPr lang="en-US" sz="1400" dirty="0">
+                <a:solidFill>
+                  <a:srgbClr val="1F2937"/>
+                </a:solidFill>
+                <a:latin typeface="Consolas"/>
+                <a:cs typeface="Consolas"/>
+              </a:rPr>
+              <a:t>stateDiagram-v2</a:t>
+            </a:r>
+          </a:p>
+          <a:p>
+            <a:pPr algn="l"/>
+            <a:r>
+              <a:rPr lang="en-US" sz="1400" dirty="0">
+                <a:solidFill>
+                  <a:srgbClr val="1F2937"/>
+                </a:solidFill>
+                <a:latin typeface="Consolas"/>
+                <a:cs typeface="Consolas"/>
+              </a:rPr>
+              <a:t>  [*] --&gt; Idle</a:t>
+            </a:r>
+          </a:p>
+          <a:p>
+            <a:pPr algn="l"/>
+            <a:r>
+              <a:rPr lang="en-US" sz="1400" dirty="0">
+                <a:solidFill>
+                  <a:srgbClr val="1F2937"/>
+                </a:solidFill>
+                <a:latin typeface="Consolas"/>
+                <a:cs typeface="Consolas"/>
+              </a:rPr>
+              <a:t>  Idle --&gt; Loading : fetch</a:t>
+            </a:r>
+          </a:p>
+          <a:p>
+            <a:pPr algn="l"/>
+            <a:r>
+              <a:rPr lang="en-US" sz="1400" dirty="0">
+                <a:solidFill>
+                  <a:srgbClr val="1F2937"/>
+                </a:solidFill>
+                <a:latin typeface="Consolas"/>
+                <a:cs typeface="Consolas"/>
+              </a:rPr>
+              <a:t>  Loading --&gt; choice1</a:t>
+            </a:r>
+          </a:p>
+          <a:p>
+            <a:pPr algn="l"/>
+            <a:r>
+              <a:rPr lang="en-US" sz="1400" dirty="0">
+                <a:solidFill>
+                  <a:srgbClr val="1F2937"/>
+                </a:solidFill>
+                <a:latin typeface="Consolas"/>
+                <a:cs typeface="Consolas"/>
+              </a:rPr>
+              <a:t>  state choice1 &lt;&lt;choice&gt;&gt;</a:t>
+            </a:r>
+          </a:p>
+          <a:p>
+            <a:pPr algn="l"/>
+            <a:r>
+              <a:rPr lang="en-US" sz="1400" dirty="0">
+                <a:solidFill>
+                  <a:srgbClr val="1F2937"/>
+                </a:solidFill>
+                <a:latin typeface="Consolas"/>
+                <a:cs typeface="Consolas"/>
+              </a:rPr>
+              <a:t>  choice1 --&gt; Success : ok</a:t>
+            </a:r>
+          </a:p>
+          <a:p>
+            <a:pPr algn="l"/>
+            <a:r>
+              <a:rPr lang="en-US" sz="1400" dirty="0">
+                <a:solidFill>
+                  <a:srgbClr val="1F2937"/>
+                </a:solidFill>
+                <a:latin typeface="Consolas"/>
+                <a:cs typeface="Consolas"/>
+              </a:rPr>
+              <a:t>  choice1 --&gt; Error : fail</a:t>
+            </a:r>
+          </a:p>
+          <a:p>
+            <a:pPr algn="l"/>
+            <a:r>
+              <a:rPr lang="en-US" sz="1400" dirty="0">
+                <a:solidFill>
+                  <a:srgbClr val="1F2937"/>
+                </a:solidFill>
+                <a:latin typeface="Consolas"/>
+                <a:cs typeface="Consolas"/>
+              </a:rPr>
+              <a:t>  Success --&gt; Idle : reset</a:t>
+            </a:r>
+          </a:p>
+          <a:p>
+            <a:pPr algn="l"/>
+            <a:r>
+              <a:rPr lang="en-US" sz="1400" dirty="0">
+                <a:solidFill>
+                  <a:srgbClr val="1F2937"/>
+                </a:solidFill>
+                <a:latin typeface="Consolas"/>
+                <a:cs typeface="Consolas"/>
+              </a:rPr>
+              <a:t>  Error --&gt; Idle : retry</a:t>
+            </a:r>
+          </a:p>
+          <a:p>
+            <a:pPr algn="l"/>
+            <a:r>
+              <a:rPr lang="en-US" sz="1400" dirty="0">
+                <a:solidFill>
+                  <a:srgbClr val="1F2937"/>
+                </a:solidFill>
+                <a:latin typeface="Consolas"/>
+                <a:cs typeface="Consolas"/>
+              </a:rPr>
+              <a:t>  Idle --&gt; [*]</a:t>
+            </a:r>
+          </a:p>
+        </p:txBody>
       </p:sp>
     </p:spTree>
   </p:cSld>
